--- a/docs/pitch-decks/investor/pptx/04-multi-agent-tech.pptx
+++ b/docs/pitch-decks/investor/pptx/04-multi-agent-tech.pptx
@@ -2221,7 +2221,7 @@
             <a:off x="5303520" y="1097280"/>
             <a:ext cx="6400800" cy="4846320"/>
           </a:xfrm>
-          <a:prstGeom prst="ellipse">
+          <a:prstGeom prst="rect">
             <a:avLst/>
           </a:prstGeom>
         </p:spPr>
@@ -5237,7 +5237,7 @@
             <a:off x="5303520" y="1097280"/>
             <a:ext cx="6400800" cy="4846320"/>
           </a:xfrm>
-          <a:prstGeom prst="ellipse">
+          <a:prstGeom prst="rect">
             <a:avLst/>
           </a:prstGeom>
         </p:spPr>

--- a/docs/pitch-decks/investor/pptx/04-multi-agent-tech.pptx
+++ b/docs/pitch-decks/investor/pptx/04-multi-agent-tech.pptx
@@ -2204,7 +2204,7 @@
       </p:sp>
       <p:pic>
         <p:nvPicPr>
-          <p:cNvPr id="7" name="Image 0" descr="C:\Users\User\datacendia-core\docs\pitch-decks\screenshots\05-decisions.png">    </p:cNvPr>
+          <p:cNvPr id="7" name="Image 0" descr="preencoded.png">    </p:cNvPr>
           <p:cNvPicPr>
             <a:picLocks noChangeAspect="1"/>
           </p:cNvPicPr>
@@ -5220,7 +5220,7 @@
       </p:sp>
       <p:pic>
         <p:nvPicPr>
-          <p:cNvPr id="7" name="Image 0" descr="C:\Users\User\datacendia-core\docs\pitch-decks\screenshots\02-council-deliberation.png">    </p:cNvPr>
+          <p:cNvPr id="7" name="Image 0" descr="preencoded.png">    </p:cNvPr>
           <p:cNvPicPr>
             <a:picLocks noChangeAspect="1"/>
           </p:cNvPicPr>

--- a/docs/pitch-decks/investor/pptx/04-multi-agent-tech.pptx
+++ b/docs/pitch-decks/investor/pptx/04-multi-agent-tech.pptx
@@ -1950,6 +1950,30 @@
           </a:p>
         </p:txBody>
       </p:sp>
+      <p:pic>
+        <p:nvPicPr>
+          <p:cNvPr id="9" name="Picture 8" descr="image.png"/>
+          <p:cNvPicPr>
+            <a:picLocks noChangeAspect="1"/>
+          </p:cNvPicPr>
+          <p:nvPr/>
+        </p:nvPicPr>
+        <p:blipFill>
+          <a:blip r:embed="rId3"/>
+          <a:stretch>
+            <a:fillRect/>
+          </a:stretch>
+        </p:blipFill>
+        <p:spPr>
+          <a:xfrm>
+            <a:off x="6885432" y="1371600"/>
+            <a:ext cx="5029200" cy="3108960"/>
+          </a:xfrm>
+          <a:prstGeom prst="rect">
+            <a:avLst/>
+          </a:prstGeom>
+        </p:spPr>
+      </p:pic>
     </p:spTree>
   </p:cSld>
   <p:clrMapOvr>
@@ -2202,9 +2226,81 @@
           </a:p>
         </p:txBody>
       </p:sp>
+      <p:sp>
+        <p:nvSpPr>
+          <p:cNvPr id="8" name="Text 5"/>
+          <p:cNvSpPr/>
+          <p:nvPr/>
+        </p:nvSpPr>
+        <p:spPr>
+          <a:xfrm>
+            <a:off x="457200" y="6400800"/>
+            <a:ext cx="3657600" cy="274320"/>
+          </a:xfrm>
+          <a:prstGeom prst="rect">
+            <a:avLst/>
+          </a:prstGeom>
+          <a:noFill/>
+          <a:ln/>
+        </p:spPr>
+        <p:txBody>
+          <a:bodyPr wrap="square" rtlCol="0" anchor="ctr"/>
+          <a:lstStyle/>
+          <a:p>
+            <a:pPr indent="0" marL="0">
+              <a:buNone/>
+            </a:pPr>
+            <a:r>
+              <a:rPr lang="en-US" sz="800" dirty="0">
+                <a:solidFill>
+                  <a:srgbClr val="8B8FA3"/>
+                </a:solidFill>
+              </a:rPr>
+              <a:t>© 2024-2026 Datacendia, LLC</a:t>
+            </a:r>
+            <a:endParaRPr lang="en-US" sz="800" dirty="0"/>
+          </a:p>
+        </p:txBody>
+      </p:sp>
+      <p:sp>
+        <p:nvSpPr>
+          <p:cNvPr id="9" name="Text 6"/>
+          <p:cNvSpPr/>
+          <p:nvPr/>
+        </p:nvSpPr>
+        <p:spPr>
+          <a:xfrm>
+            <a:off x="8229600" y="6400800"/>
+            <a:ext cx="3657600" cy="274320"/>
+          </a:xfrm>
+          <a:prstGeom prst="rect">
+            <a:avLst/>
+          </a:prstGeom>
+          <a:noFill/>
+          <a:ln/>
+        </p:spPr>
+        <p:txBody>
+          <a:bodyPr wrap="square" rtlCol="0" anchor="ctr"/>
+          <a:lstStyle/>
+          <a:p>
+            <a:pPr algn="r" indent="0" marL="0">
+              <a:buNone/>
+            </a:pPr>
+            <a:r>
+              <a:rPr lang="en-US" sz="800" dirty="0">
+                <a:solidFill>
+                  <a:srgbClr val="8B8FA3"/>
+                </a:solidFill>
+              </a:rPr>
+              <a:t>datacendia.com</a:t>
+            </a:r>
+            <a:endParaRPr lang="en-US" sz="800" dirty="0"/>
+          </a:p>
+        </p:txBody>
+      </p:sp>
       <p:pic>
         <p:nvPicPr>
-          <p:cNvPr id="7" name="Image 0" descr="preencoded.png">    </p:cNvPr>
+          <p:cNvPr id="10" name="Picture 9" descr="image.png"/>
           <p:cNvPicPr>
             <a:picLocks noChangeAspect="1"/>
           </p:cNvPicPr>
@@ -2218,86 +2314,14 @@
         </p:blipFill>
         <p:spPr>
           <a:xfrm>
-            <a:off x="5303520" y="1097280"/>
-            <a:ext cx="6400800" cy="4846320"/>
+            <a:off x="6885432" y="1371600"/>
+            <a:ext cx="5029200" cy="3108960"/>
           </a:xfrm>
           <a:prstGeom prst="rect">
             <a:avLst/>
           </a:prstGeom>
         </p:spPr>
       </p:pic>
-      <p:sp>
-        <p:nvSpPr>
-          <p:cNvPr id="8" name="Text 5"/>
-          <p:cNvSpPr/>
-          <p:nvPr/>
-        </p:nvSpPr>
-        <p:spPr>
-          <a:xfrm>
-            <a:off x="457200" y="6400800"/>
-            <a:ext cx="3657600" cy="274320"/>
-          </a:xfrm>
-          <a:prstGeom prst="rect">
-            <a:avLst/>
-          </a:prstGeom>
-          <a:noFill/>
-          <a:ln/>
-        </p:spPr>
-        <p:txBody>
-          <a:bodyPr wrap="square" rtlCol="0" anchor="ctr"/>
-          <a:lstStyle/>
-          <a:p>
-            <a:pPr indent="0" marL="0">
-              <a:buNone/>
-            </a:pPr>
-            <a:r>
-              <a:rPr lang="en-US" sz="800" dirty="0">
-                <a:solidFill>
-                  <a:srgbClr val="8B8FA3"/>
-                </a:solidFill>
-              </a:rPr>
-              <a:t>© 2024-2026 Datacendia, LLC</a:t>
-            </a:r>
-            <a:endParaRPr lang="en-US" sz="800" dirty="0"/>
-          </a:p>
-        </p:txBody>
-      </p:sp>
-      <p:sp>
-        <p:nvSpPr>
-          <p:cNvPr id="9" name="Text 6"/>
-          <p:cNvSpPr/>
-          <p:nvPr/>
-        </p:nvSpPr>
-        <p:spPr>
-          <a:xfrm>
-            <a:off x="8229600" y="6400800"/>
-            <a:ext cx="3657600" cy="274320"/>
-          </a:xfrm>
-          <a:prstGeom prst="rect">
-            <a:avLst/>
-          </a:prstGeom>
-          <a:noFill/>
-          <a:ln/>
-        </p:spPr>
-        <p:txBody>
-          <a:bodyPr wrap="square" rtlCol="0" anchor="ctr"/>
-          <a:lstStyle/>
-          <a:p>
-            <a:pPr algn="r" indent="0" marL="0">
-              <a:buNone/>
-            </a:pPr>
-            <a:r>
-              <a:rPr lang="en-US" sz="800" dirty="0">
-                <a:solidFill>
-                  <a:srgbClr val="8B8FA3"/>
-                </a:solidFill>
-              </a:rPr>
-              <a:t>datacendia.com</a:t>
-            </a:r>
-            <a:endParaRPr lang="en-US" sz="800" dirty="0"/>
-          </a:p>
-        </p:txBody>
-      </p:sp>
     </p:spTree>
   </p:cSld>
   <p:clrMapOvr>
@@ -2546,6 +2570,30 @@
           </a:p>
         </p:txBody>
       </p:sp>
+      <p:pic>
+        <p:nvPicPr>
+          <p:cNvPr id="8" name="Picture 7" descr="25-dissent.png"/>
+          <p:cNvPicPr>
+            <a:picLocks noChangeAspect="1"/>
+          </p:cNvPicPr>
+          <p:nvPr/>
+        </p:nvPicPr>
+        <p:blipFill>
+          <a:blip r:embed="rId3"/>
+          <a:stretch>
+            <a:fillRect/>
+          </a:stretch>
+        </p:blipFill>
+        <p:spPr>
+          <a:xfrm>
+            <a:off x="6885432" y="1371600"/>
+            <a:ext cx="5029200" cy="3108960"/>
+          </a:xfrm>
+          <a:prstGeom prst="rect">
+            <a:avLst/>
+          </a:prstGeom>
+        </p:spPr>
+      </p:pic>
     </p:spTree>
   </p:cSld>
   <p:clrMapOvr>
@@ -3338,6 +3386,30 @@
           </a:p>
         </p:txBody>
       </p:sp>
+      <p:pic>
+        <p:nvPicPr>
+          <p:cNvPr id="9" name="Picture 8" descr="16-redteam.png"/>
+          <p:cNvPicPr>
+            <a:picLocks noChangeAspect="1"/>
+          </p:cNvPicPr>
+          <p:nvPr/>
+        </p:nvPicPr>
+        <p:blipFill>
+          <a:blip r:embed="rId3"/>
+          <a:stretch>
+            <a:fillRect/>
+          </a:stretch>
+        </p:blipFill>
+        <p:spPr>
+          <a:xfrm>
+            <a:off x="6885432" y="1371600"/>
+            <a:ext cx="5029200" cy="3108960"/>
+          </a:xfrm>
+          <a:prstGeom prst="rect">
+            <a:avLst/>
+          </a:prstGeom>
+        </p:spPr>
+      </p:pic>
     </p:spTree>
   </p:cSld>
   <p:clrMapOvr>
@@ -4000,6 +4072,30 @@
           </a:p>
         </p:txBody>
       </p:sp>
+      <p:pic>
+        <p:nvPicPr>
+          <p:cNvPr id="9" name="Picture 8" descr="image.png"/>
+          <p:cNvPicPr>
+            <a:picLocks noChangeAspect="1"/>
+          </p:cNvPicPr>
+          <p:nvPr/>
+        </p:nvPicPr>
+        <p:blipFill>
+          <a:blip r:embed="rId3"/>
+          <a:stretch>
+            <a:fillRect/>
+          </a:stretch>
+        </p:blipFill>
+        <p:spPr>
+          <a:xfrm>
+            <a:off x="6885432" y="1371600"/>
+            <a:ext cx="5029200" cy="3108960"/>
+          </a:xfrm>
+          <a:prstGeom prst="rect">
+            <a:avLst/>
+          </a:prstGeom>
+        </p:spPr>
+      </p:pic>
     </p:spTree>
   </p:cSld>
   <p:clrMapOvr>
@@ -4378,6 +4474,30 @@
           </a:p>
         </p:txBody>
       </p:sp>
+      <p:pic>
+        <p:nvPicPr>
+          <p:cNvPr id="9" name="Picture 8" descr="25-dissent.png"/>
+          <p:cNvPicPr>
+            <a:picLocks noChangeAspect="1"/>
+          </p:cNvPicPr>
+          <p:nvPr/>
+        </p:nvPicPr>
+        <p:blipFill>
+          <a:blip r:embed="rId3"/>
+          <a:stretch>
+            <a:fillRect/>
+          </a:stretch>
+        </p:blipFill>
+        <p:spPr>
+          <a:xfrm>
+            <a:off x="6885432" y="1371600"/>
+            <a:ext cx="5029200" cy="3108960"/>
+          </a:xfrm>
+          <a:prstGeom prst="rect">
+            <a:avLst/>
+          </a:prstGeom>
+        </p:spPr>
+      </p:pic>
     </p:spTree>
   </p:cSld>
   <p:clrMapOvr>
@@ -4539,6 +4659,10 @@
           </a:solidFill>
           <a:ln/>
         </p:spPr>
+        <p:txBody>
+          <a:bodyPr/>
+          <a:p/>
+        </p:txBody>
       </p:sp>
       <p:sp>
         <p:nvSpPr>
@@ -4633,6 +4757,10 @@
           </a:solidFill>
           <a:ln/>
         </p:spPr>
+        <p:txBody>
+          <a:bodyPr/>
+          <a:p/>
+        </p:txBody>
       </p:sp>
       <p:sp>
         <p:nvSpPr>
@@ -4727,6 +4855,10 @@
           </a:solidFill>
           <a:ln/>
         </p:spPr>
+        <p:txBody>
+          <a:bodyPr/>
+          <a:p/>
+        </p:txBody>
       </p:sp>
       <p:sp>
         <p:nvSpPr>
@@ -4821,6 +4953,10 @@
           </a:solidFill>
           <a:ln/>
         </p:spPr>
+        <p:txBody>
+          <a:bodyPr/>
+          <a:p/>
+        </p:txBody>
       </p:sp>
       <p:sp>
         <p:nvSpPr>
@@ -5218,9 +5354,81 @@
           </a:p>
         </p:txBody>
       </p:sp>
+      <p:sp>
+        <p:nvSpPr>
+          <p:cNvPr id="8" name="Text 5"/>
+          <p:cNvSpPr/>
+          <p:nvPr/>
+        </p:nvSpPr>
+        <p:spPr>
+          <a:xfrm>
+            <a:off x="457200" y="6400800"/>
+            <a:ext cx="3657600" cy="274320"/>
+          </a:xfrm>
+          <a:prstGeom prst="rect">
+            <a:avLst/>
+          </a:prstGeom>
+          <a:noFill/>
+          <a:ln/>
+        </p:spPr>
+        <p:txBody>
+          <a:bodyPr wrap="square" rtlCol="0" anchor="ctr"/>
+          <a:lstStyle/>
+          <a:p>
+            <a:pPr indent="0" marL="0">
+              <a:buNone/>
+            </a:pPr>
+            <a:r>
+              <a:rPr lang="en-US" sz="800" dirty="0">
+                <a:solidFill>
+                  <a:srgbClr val="8B8FA3"/>
+                </a:solidFill>
+              </a:rPr>
+              <a:t>© 2024-2026 Datacendia, LLC</a:t>
+            </a:r>
+            <a:endParaRPr lang="en-US" sz="800" dirty="0"/>
+          </a:p>
+        </p:txBody>
+      </p:sp>
+      <p:sp>
+        <p:nvSpPr>
+          <p:cNvPr id="9" name="Text 6"/>
+          <p:cNvSpPr/>
+          <p:nvPr/>
+        </p:nvSpPr>
+        <p:spPr>
+          <a:xfrm>
+            <a:off x="8229600" y="6400800"/>
+            <a:ext cx="3657600" cy="274320"/>
+          </a:xfrm>
+          <a:prstGeom prst="rect">
+            <a:avLst/>
+          </a:prstGeom>
+          <a:noFill/>
+          <a:ln/>
+        </p:spPr>
+        <p:txBody>
+          <a:bodyPr wrap="square" rtlCol="0" anchor="ctr"/>
+          <a:lstStyle/>
+          <a:p>
+            <a:pPr algn="r" indent="0" marL="0">
+              <a:buNone/>
+            </a:pPr>
+            <a:r>
+              <a:rPr lang="en-US" sz="800" dirty="0">
+                <a:solidFill>
+                  <a:srgbClr val="8B8FA3"/>
+                </a:solidFill>
+              </a:rPr>
+              <a:t>datacendia.com</a:t>
+            </a:r>
+            <a:endParaRPr lang="en-US" sz="800" dirty="0"/>
+          </a:p>
+        </p:txBody>
+      </p:sp>
       <p:pic>
         <p:nvPicPr>
-          <p:cNvPr id="7" name="Image 0" descr="preencoded.png">    </p:cNvPr>
+          <p:cNvPr id="10" name="Picture 9" descr="image.png"/>
           <p:cNvPicPr>
             <a:picLocks noChangeAspect="1"/>
           </p:cNvPicPr>
@@ -5234,86 +5442,14 @@
         </p:blipFill>
         <p:spPr>
           <a:xfrm>
-            <a:off x="5303520" y="1097280"/>
-            <a:ext cx="6400800" cy="4846320"/>
+            <a:off x="6885432" y="1371600"/>
+            <a:ext cx="5029200" cy="3108960"/>
           </a:xfrm>
           <a:prstGeom prst="rect">
             <a:avLst/>
           </a:prstGeom>
         </p:spPr>
       </p:pic>
-      <p:sp>
-        <p:nvSpPr>
-          <p:cNvPr id="8" name="Text 5"/>
-          <p:cNvSpPr/>
-          <p:nvPr/>
-        </p:nvSpPr>
-        <p:spPr>
-          <a:xfrm>
-            <a:off x="457200" y="6400800"/>
-            <a:ext cx="3657600" cy="274320"/>
-          </a:xfrm>
-          <a:prstGeom prst="rect">
-            <a:avLst/>
-          </a:prstGeom>
-          <a:noFill/>
-          <a:ln/>
-        </p:spPr>
-        <p:txBody>
-          <a:bodyPr wrap="square" rtlCol="0" anchor="ctr"/>
-          <a:lstStyle/>
-          <a:p>
-            <a:pPr indent="0" marL="0">
-              <a:buNone/>
-            </a:pPr>
-            <a:r>
-              <a:rPr lang="en-US" sz="800" dirty="0">
-                <a:solidFill>
-                  <a:srgbClr val="8B8FA3"/>
-                </a:solidFill>
-              </a:rPr>
-              <a:t>© 2024-2026 Datacendia, LLC</a:t>
-            </a:r>
-            <a:endParaRPr lang="en-US" sz="800" dirty="0"/>
-          </a:p>
-        </p:txBody>
-      </p:sp>
-      <p:sp>
-        <p:nvSpPr>
-          <p:cNvPr id="9" name="Text 6"/>
-          <p:cNvSpPr/>
-          <p:nvPr/>
-        </p:nvSpPr>
-        <p:spPr>
-          <a:xfrm>
-            <a:off x="8229600" y="6400800"/>
-            <a:ext cx="3657600" cy="274320"/>
-          </a:xfrm>
-          <a:prstGeom prst="rect">
-            <a:avLst/>
-          </a:prstGeom>
-          <a:noFill/>
-          <a:ln/>
-        </p:spPr>
-        <p:txBody>
-          <a:bodyPr wrap="square" rtlCol="0" anchor="ctr"/>
-          <a:lstStyle/>
-          <a:p>
-            <a:pPr algn="r" indent="0" marL="0">
-              <a:buNone/>
-            </a:pPr>
-            <a:r>
-              <a:rPr lang="en-US" sz="800" dirty="0">
-                <a:solidFill>
-                  <a:srgbClr val="8B8FA3"/>
-                </a:solidFill>
-              </a:rPr>
-              <a:t>datacendia.com</a:t>
-            </a:r>
-            <a:endParaRPr lang="en-US" sz="800" dirty="0"/>
-          </a:p>
-        </p:txBody>
-      </p:sp>
     </p:spTree>
   </p:cSld>
   <p:clrMapOvr>

--- a/docs/pitch-decks/investor/pptx/04-multi-agent-tech.pptx
+++ b/docs/pitch-decks/investor/pptx/04-multi-agent-tech.pptx
@@ -1950,30 +1950,6 @@
           </a:p>
         </p:txBody>
       </p:sp>
-      <p:pic>
-        <p:nvPicPr>
-          <p:cNvPr id="9" name="Picture 8" descr="image.png"/>
-          <p:cNvPicPr>
-            <a:picLocks noChangeAspect="1"/>
-          </p:cNvPicPr>
-          <p:nvPr/>
-        </p:nvPicPr>
-        <p:blipFill>
-          <a:blip r:embed="rId3"/>
-          <a:stretch>
-            <a:fillRect/>
-          </a:stretch>
-        </p:blipFill>
-        <p:spPr>
-          <a:xfrm>
-            <a:off x="6885432" y="1371600"/>
-            <a:ext cx="5029200" cy="3108960"/>
-          </a:xfrm>
-          <a:prstGeom prst="rect">
-            <a:avLst/>
-          </a:prstGeom>
-        </p:spPr>
-      </p:pic>
     </p:spTree>
   </p:cSld>
   <p:clrMapOvr>
@@ -2226,81 +2202,9 @@
           </a:p>
         </p:txBody>
       </p:sp>
-      <p:sp>
-        <p:nvSpPr>
-          <p:cNvPr id="8" name="Text 5"/>
-          <p:cNvSpPr/>
-          <p:nvPr/>
-        </p:nvSpPr>
-        <p:spPr>
-          <a:xfrm>
-            <a:off x="457200" y="6400800"/>
-            <a:ext cx="3657600" cy="274320"/>
-          </a:xfrm>
-          <a:prstGeom prst="rect">
-            <a:avLst/>
-          </a:prstGeom>
-          <a:noFill/>
-          <a:ln/>
-        </p:spPr>
-        <p:txBody>
-          <a:bodyPr wrap="square" rtlCol="0" anchor="ctr"/>
-          <a:lstStyle/>
-          <a:p>
-            <a:pPr indent="0" marL="0">
-              <a:buNone/>
-            </a:pPr>
-            <a:r>
-              <a:rPr lang="en-US" sz="800" dirty="0">
-                <a:solidFill>
-                  <a:srgbClr val="8B8FA3"/>
-                </a:solidFill>
-              </a:rPr>
-              <a:t>© 2024-2026 Datacendia, LLC</a:t>
-            </a:r>
-            <a:endParaRPr lang="en-US" sz="800" dirty="0"/>
-          </a:p>
-        </p:txBody>
-      </p:sp>
-      <p:sp>
-        <p:nvSpPr>
-          <p:cNvPr id="9" name="Text 6"/>
-          <p:cNvSpPr/>
-          <p:nvPr/>
-        </p:nvSpPr>
-        <p:spPr>
-          <a:xfrm>
-            <a:off x="8229600" y="6400800"/>
-            <a:ext cx="3657600" cy="274320"/>
-          </a:xfrm>
-          <a:prstGeom prst="rect">
-            <a:avLst/>
-          </a:prstGeom>
-          <a:noFill/>
-          <a:ln/>
-        </p:spPr>
-        <p:txBody>
-          <a:bodyPr wrap="square" rtlCol="0" anchor="ctr"/>
-          <a:lstStyle/>
-          <a:p>
-            <a:pPr algn="r" indent="0" marL="0">
-              <a:buNone/>
-            </a:pPr>
-            <a:r>
-              <a:rPr lang="en-US" sz="800" dirty="0">
-                <a:solidFill>
-                  <a:srgbClr val="8B8FA3"/>
-                </a:solidFill>
-              </a:rPr>
-              <a:t>datacendia.com</a:t>
-            </a:r>
-            <a:endParaRPr lang="en-US" sz="800" dirty="0"/>
-          </a:p>
-        </p:txBody>
-      </p:sp>
       <p:pic>
         <p:nvPicPr>
-          <p:cNvPr id="10" name="Picture 9" descr="image.png"/>
+          <p:cNvPr id="7" name="Image 0" descr="preencoded.png">    </p:cNvPr>
           <p:cNvPicPr>
             <a:picLocks noChangeAspect="1"/>
           </p:cNvPicPr>
@@ -2314,14 +2218,86 @@
         </p:blipFill>
         <p:spPr>
           <a:xfrm>
-            <a:off x="6885432" y="1371600"/>
-            <a:ext cx="5029200" cy="3108960"/>
+            <a:off x="5303520" y="1097280"/>
+            <a:ext cx="6400800" cy="4846320"/>
           </a:xfrm>
           <a:prstGeom prst="rect">
             <a:avLst/>
           </a:prstGeom>
         </p:spPr>
       </p:pic>
+      <p:sp>
+        <p:nvSpPr>
+          <p:cNvPr id="8" name="Text 5"/>
+          <p:cNvSpPr/>
+          <p:nvPr/>
+        </p:nvSpPr>
+        <p:spPr>
+          <a:xfrm>
+            <a:off x="457200" y="6400800"/>
+            <a:ext cx="3657600" cy="274320"/>
+          </a:xfrm>
+          <a:prstGeom prst="rect">
+            <a:avLst/>
+          </a:prstGeom>
+          <a:noFill/>
+          <a:ln/>
+        </p:spPr>
+        <p:txBody>
+          <a:bodyPr wrap="square" rtlCol="0" anchor="ctr"/>
+          <a:lstStyle/>
+          <a:p>
+            <a:pPr indent="0" marL="0">
+              <a:buNone/>
+            </a:pPr>
+            <a:r>
+              <a:rPr lang="en-US" sz="800" dirty="0">
+                <a:solidFill>
+                  <a:srgbClr val="8B8FA3"/>
+                </a:solidFill>
+              </a:rPr>
+              <a:t>© 2024-2026 Datacendia, LLC</a:t>
+            </a:r>
+            <a:endParaRPr lang="en-US" sz="800" dirty="0"/>
+          </a:p>
+        </p:txBody>
+      </p:sp>
+      <p:sp>
+        <p:nvSpPr>
+          <p:cNvPr id="9" name="Text 6"/>
+          <p:cNvSpPr/>
+          <p:nvPr/>
+        </p:nvSpPr>
+        <p:spPr>
+          <a:xfrm>
+            <a:off x="8229600" y="6400800"/>
+            <a:ext cx="3657600" cy="274320"/>
+          </a:xfrm>
+          <a:prstGeom prst="rect">
+            <a:avLst/>
+          </a:prstGeom>
+          <a:noFill/>
+          <a:ln/>
+        </p:spPr>
+        <p:txBody>
+          <a:bodyPr wrap="square" rtlCol="0" anchor="ctr"/>
+          <a:lstStyle/>
+          <a:p>
+            <a:pPr algn="r" indent="0" marL="0">
+              <a:buNone/>
+            </a:pPr>
+            <a:r>
+              <a:rPr lang="en-US" sz="800" dirty="0">
+                <a:solidFill>
+                  <a:srgbClr val="8B8FA3"/>
+                </a:solidFill>
+              </a:rPr>
+              <a:t>datacendia.com</a:t>
+            </a:r>
+            <a:endParaRPr lang="en-US" sz="800" dirty="0"/>
+          </a:p>
+        </p:txBody>
+      </p:sp>
     </p:spTree>
   </p:cSld>
   <p:clrMapOvr>
@@ -2570,30 +2546,6 @@
           </a:p>
         </p:txBody>
       </p:sp>
-      <p:pic>
-        <p:nvPicPr>
-          <p:cNvPr id="8" name="Picture 7" descr="25-dissent.png"/>
-          <p:cNvPicPr>
-            <a:picLocks noChangeAspect="1"/>
-          </p:cNvPicPr>
-          <p:nvPr/>
-        </p:nvPicPr>
-        <p:blipFill>
-          <a:blip r:embed="rId3"/>
-          <a:stretch>
-            <a:fillRect/>
-          </a:stretch>
-        </p:blipFill>
-        <p:spPr>
-          <a:xfrm>
-            <a:off x="6885432" y="1371600"/>
-            <a:ext cx="5029200" cy="3108960"/>
-          </a:xfrm>
-          <a:prstGeom prst="rect">
-            <a:avLst/>
-          </a:prstGeom>
-        </p:spPr>
-      </p:pic>
     </p:spTree>
   </p:cSld>
   <p:clrMapOvr>
@@ -3386,30 +3338,6 @@
           </a:p>
         </p:txBody>
       </p:sp>
-      <p:pic>
-        <p:nvPicPr>
-          <p:cNvPr id="9" name="Picture 8" descr="16-redteam.png"/>
-          <p:cNvPicPr>
-            <a:picLocks noChangeAspect="1"/>
-          </p:cNvPicPr>
-          <p:nvPr/>
-        </p:nvPicPr>
-        <p:blipFill>
-          <a:blip r:embed="rId3"/>
-          <a:stretch>
-            <a:fillRect/>
-          </a:stretch>
-        </p:blipFill>
-        <p:spPr>
-          <a:xfrm>
-            <a:off x="6885432" y="1371600"/>
-            <a:ext cx="5029200" cy="3108960"/>
-          </a:xfrm>
-          <a:prstGeom prst="rect">
-            <a:avLst/>
-          </a:prstGeom>
-        </p:spPr>
-      </p:pic>
     </p:spTree>
   </p:cSld>
   <p:clrMapOvr>
@@ -4072,30 +4000,6 @@
           </a:p>
         </p:txBody>
       </p:sp>
-      <p:pic>
-        <p:nvPicPr>
-          <p:cNvPr id="9" name="Picture 8" descr="image.png"/>
-          <p:cNvPicPr>
-            <a:picLocks noChangeAspect="1"/>
-          </p:cNvPicPr>
-          <p:nvPr/>
-        </p:nvPicPr>
-        <p:blipFill>
-          <a:blip r:embed="rId3"/>
-          <a:stretch>
-            <a:fillRect/>
-          </a:stretch>
-        </p:blipFill>
-        <p:spPr>
-          <a:xfrm>
-            <a:off x="6885432" y="1371600"/>
-            <a:ext cx="5029200" cy="3108960"/>
-          </a:xfrm>
-          <a:prstGeom prst="rect">
-            <a:avLst/>
-          </a:prstGeom>
-        </p:spPr>
-      </p:pic>
     </p:spTree>
   </p:cSld>
   <p:clrMapOvr>
@@ -4474,30 +4378,6 @@
           </a:p>
         </p:txBody>
       </p:sp>
-      <p:pic>
-        <p:nvPicPr>
-          <p:cNvPr id="9" name="Picture 8" descr="25-dissent.png"/>
-          <p:cNvPicPr>
-            <a:picLocks noChangeAspect="1"/>
-          </p:cNvPicPr>
-          <p:nvPr/>
-        </p:nvPicPr>
-        <p:blipFill>
-          <a:blip r:embed="rId3"/>
-          <a:stretch>
-            <a:fillRect/>
-          </a:stretch>
-        </p:blipFill>
-        <p:spPr>
-          <a:xfrm>
-            <a:off x="6885432" y="1371600"/>
-            <a:ext cx="5029200" cy="3108960"/>
-          </a:xfrm>
-          <a:prstGeom prst="rect">
-            <a:avLst/>
-          </a:prstGeom>
-        </p:spPr>
-      </p:pic>
     </p:spTree>
   </p:cSld>
   <p:clrMapOvr>
@@ -4659,10 +4539,6 @@
           </a:solidFill>
           <a:ln/>
         </p:spPr>
-        <p:txBody>
-          <a:bodyPr/>
-          <a:p/>
-        </p:txBody>
       </p:sp>
       <p:sp>
         <p:nvSpPr>
@@ -4757,10 +4633,6 @@
           </a:solidFill>
           <a:ln/>
         </p:spPr>
-        <p:txBody>
-          <a:bodyPr/>
-          <a:p/>
-        </p:txBody>
       </p:sp>
       <p:sp>
         <p:nvSpPr>
@@ -4855,10 +4727,6 @@
           </a:solidFill>
           <a:ln/>
         </p:spPr>
-        <p:txBody>
-          <a:bodyPr/>
-          <a:p/>
-        </p:txBody>
       </p:sp>
       <p:sp>
         <p:nvSpPr>
@@ -4953,10 +4821,6 @@
           </a:solidFill>
           <a:ln/>
         </p:spPr>
-        <p:txBody>
-          <a:bodyPr/>
-          <a:p/>
-        </p:txBody>
       </p:sp>
       <p:sp>
         <p:nvSpPr>
@@ -5354,81 +5218,9 @@
           </a:p>
         </p:txBody>
       </p:sp>
-      <p:sp>
-        <p:nvSpPr>
-          <p:cNvPr id="8" name="Text 5"/>
-          <p:cNvSpPr/>
-          <p:nvPr/>
-        </p:nvSpPr>
-        <p:spPr>
-          <a:xfrm>
-            <a:off x="457200" y="6400800"/>
-            <a:ext cx="3657600" cy="274320"/>
-          </a:xfrm>
-          <a:prstGeom prst="rect">
-            <a:avLst/>
-          </a:prstGeom>
-          <a:noFill/>
-          <a:ln/>
-        </p:spPr>
-        <p:txBody>
-          <a:bodyPr wrap="square" rtlCol="0" anchor="ctr"/>
-          <a:lstStyle/>
-          <a:p>
-            <a:pPr indent="0" marL="0">
-              <a:buNone/>
-            </a:pPr>
-            <a:r>
-              <a:rPr lang="en-US" sz="800" dirty="0">
-                <a:solidFill>
-                  <a:srgbClr val="8B8FA3"/>
-                </a:solidFill>
-              </a:rPr>
-              <a:t>© 2024-2026 Datacendia, LLC</a:t>
-            </a:r>
-            <a:endParaRPr lang="en-US" sz="800" dirty="0"/>
-          </a:p>
-        </p:txBody>
-      </p:sp>
-      <p:sp>
-        <p:nvSpPr>
-          <p:cNvPr id="9" name="Text 6"/>
-          <p:cNvSpPr/>
-          <p:nvPr/>
-        </p:nvSpPr>
-        <p:spPr>
-          <a:xfrm>
-            <a:off x="8229600" y="6400800"/>
-            <a:ext cx="3657600" cy="274320"/>
-          </a:xfrm>
-          <a:prstGeom prst="rect">
-            <a:avLst/>
-          </a:prstGeom>
-          <a:noFill/>
-          <a:ln/>
-        </p:spPr>
-        <p:txBody>
-          <a:bodyPr wrap="square" rtlCol="0" anchor="ctr"/>
-          <a:lstStyle/>
-          <a:p>
-            <a:pPr algn="r" indent="0" marL="0">
-              <a:buNone/>
-            </a:pPr>
-            <a:r>
-              <a:rPr lang="en-US" sz="800" dirty="0">
-                <a:solidFill>
-                  <a:srgbClr val="8B8FA3"/>
-                </a:solidFill>
-              </a:rPr>
-              <a:t>datacendia.com</a:t>
-            </a:r>
-            <a:endParaRPr lang="en-US" sz="800" dirty="0"/>
-          </a:p>
-        </p:txBody>
-      </p:sp>
       <p:pic>
         <p:nvPicPr>
-          <p:cNvPr id="10" name="Picture 9" descr="image.png"/>
+          <p:cNvPr id="7" name="Image 0" descr="preencoded.png">    </p:cNvPr>
           <p:cNvPicPr>
             <a:picLocks noChangeAspect="1"/>
           </p:cNvPicPr>
@@ -5442,14 +5234,86 @@
         </p:blipFill>
         <p:spPr>
           <a:xfrm>
-            <a:off x="6885432" y="1371600"/>
-            <a:ext cx="5029200" cy="3108960"/>
+            <a:off x="5303520" y="1097280"/>
+            <a:ext cx="6400800" cy="4846320"/>
           </a:xfrm>
           <a:prstGeom prst="rect">
             <a:avLst/>
           </a:prstGeom>
         </p:spPr>
       </p:pic>
+      <p:sp>
+        <p:nvSpPr>
+          <p:cNvPr id="8" name="Text 5"/>
+          <p:cNvSpPr/>
+          <p:nvPr/>
+        </p:nvSpPr>
+        <p:spPr>
+          <a:xfrm>
+            <a:off x="457200" y="6400800"/>
+            <a:ext cx="3657600" cy="274320"/>
+          </a:xfrm>
+          <a:prstGeom prst="rect">
+            <a:avLst/>
+          </a:prstGeom>
+          <a:noFill/>
+          <a:ln/>
+        </p:spPr>
+        <p:txBody>
+          <a:bodyPr wrap="square" rtlCol="0" anchor="ctr"/>
+          <a:lstStyle/>
+          <a:p>
+            <a:pPr indent="0" marL="0">
+              <a:buNone/>
+            </a:pPr>
+            <a:r>
+              <a:rPr lang="en-US" sz="800" dirty="0">
+                <a:solidFill>
+                  <a:srgbClr val="8B8FA3"/>
+                </a:solidFill>
+              </a:rPr>
+              <a:t>© 2024-2026 Datacendia, LLC</a:t>
+            </a:r>
+            <a:endParaRPr lang="en-US" sz="800" dirty="0"/>
+          </a:p>
+        </p:txBody>
+      </p:sp>
+      <p:sp>
+        <p:nvSpPr>
+          <p:cNvPr id="9" name="Text 6"/>
+          <p:cNvSpPr/>
+          <p:nvPr/>
+        </p:nvSpPr>
+        <p:spPr>
+          <a:xfrm>
+            <a:off x="8229600" y="6400800"/>
+            <a:ext cx="3657600" cy="274320"/>
+          </a:xfrm>
+          <a:prstGeom prst="rect">
+            <a:avLst/>
+          </a:prstGeom>
+          <a:noFill/>
+          <a:ln/>
+        </p:spPr>
+        <p:txBody>
+          <a:bodyPr wrap="square" rtlCol="0" anchor="ctr"/>
+          <a:lstStyle/>
+          <a:p>
+            <a:pPr algn="r" indent="0" marL="0">
+              <a:buNone/>
+            </a:pPr>
+            <a:r>
+              <a:rPr lang="en-US" sz="800" dirty="0">
+                <a:solidFill>
+                  <a:srgbClr val="8B8FA3"/>
+                </a:solidFill>
+              </a:rPr>
+              <a:t>datacendia.com</a:t>
+            </a:r>
+            <a:endParaRPr lang="en-US" sz="800" dirty="0"/>
+          </a:p>
+        </p:txBody>
+      </p:sp>
     </p:spTree>
   </p:cSld>
   <p:clrMapOvr>

--- a/docs/pitch-decks/investor/pptx/04-multi-agent-tech.pptx
+++ b/docs/pitch-decks/investor/pptx/04-multi-agent-tech.pptx
@@ -2202,9 +2202,81 @@
           </a:p>
         </p:txBody>
       </p:sp>
+      <p:sp>
+        <p:nvSpPr>
+          <p:cNvPr id="8" name="Text 5"/>
+          <p:cNvSpPr/>
+          <p:nvPr/>
+        </p:nvSpPr>
+        <p:spPr>
+          <a:xfrm>
+            <a:off x="457200" y="6400800"/>
+            <a:ext cx="3657600" cy="274320"/>
+          </a:xfrm>
+          <a:prstGeom prst="rect">
+            <a:avLst/>
+          </a:prstGeom>
+          <a:noFill/>
+          <a:ln/>
+        </p:spPr>
+        <p:txBody>
+          <a:bodyPr wrap="square" rtlCol="0" anchor="ctr"/>
+          <a:lstStyle/>
+          <a:p>
+            <a:pPr indent="0" marL="0">
+              <a:buNone/>
+            </a:pPr>
+            <a:r>
+              <a:rPr lang="en-US" sz="800" dirty="0">
+                <a:solidFill>
+                  <a:srgbClr val="8B8FA3"/>
+                </a:solidFill>
+              </a:rPr>
+              <a:t>© 2024-2026 Datacendia, LLC</a:t>
+            </a:r>
+            <a:endParaRPr lang="en-US" sz="800" dirty="0"/>
+          </a:p>
+        </p:txBody>
+      </p:sp>
+      <p:sp>
+        <p:nvSpPr>
+          <p:cNvPr id="9" name="Text 6"/>
+          <p:cNvSpPr/>
+          <p:nvPr/>
+        </p:nvSpPr>
+        <p:spPr>
+          <a:xfrm>
+            <a:off x="8229600" y="6400800"/>
+            <a:ext cx="3657600" cy="274320"/>
+          </a:xfrm>
+          <a:prstGeom prst="rect">
+            <a:avLst/>
+          </a:prstGeom>
+          <a:noFill/>
+          <a:ln/>
+        </p:spPr>
+        <p:txBody>
+          <a:bodyPr wrap="square" rtlCol="0" anchor="ctr"/>
+          <a:lstStyle/>
+          <a:p>
+            <a:pPr algn="r" indent="0" marL="0">
+              <a:buNone/>
+            </a:pPr>
+            <a:r>
+              <a:rPr lang="en-US" sz="800" dirty="0">
+                <a:solidFill>
+                  <a:srgbClr val="8B8FA3"/>
+                </a:solidFill>
+              </a:rPr>
+              <a:t>datacendia.com</a:t>
+            </a:r>
+            <a:endParaRPr lang="en-US" sz="800" dirty="0"/>
+          </a:p>
+        </p:txBody>
+      </p:sp>
       <p:pic>
         <p:nvPicPr>
-          <p:cNvPr id="7" name="Image 0" descr="preencoded.png">    </p:cNvPr>
+          <p:cNvPr id="10" name="Picture 9" descr="image.png"/>
           <p:cNvPicPr>
             <a:picLocks noChangeAspect="1"/>
           </p:cNvPicPr>
@@ -2226,78 +2298,6 @@
           </a:prstGeom>
         </p:spPr>
       </p:pic>
-      <p:sp>
-        <p:nvSpPr>
-          <p:cNvPr id="8" name="Text 5"/>
-          <p:cNvSpPr/>
-          <p:nvPr/>
-        </p:nvSpPr>
-        <p:spPr>
-          <a:xfrm>
-            <a:off x="457200" y="6400800"/>
-            <a:ext cx="3657600" cy="274320"/>
-          </a:xfrm>
-          <a:prstGeom prst="rect">
-            <a:avLst/>
-          </a:prstGeom>
-          <a:noFill/>
-          <a:ln/>
-        </p:spPr>
-        <p:txBody>
-          <a:bodyPr wrap="square" rtlCol="0" anchor="ctr"/>
-          <a:lstStyle/>
-          <a:p>
-            <a:pPr indent="0" marL="0">
-              <a:buNone/>
-            </a:pPr>
-            <a:r>
-              <a:rPr lang="en-US" sz="800" dirty="0">
-                <a:solidFill>
-                  <a:srgbClr val="8B8FA3"/>
-                </a:solidFill>
-              </a:rPr>
-              <a:t>© 2024-2026 Datacendia, LLC</a:t>
-            </a:r>
-            <a:endParaRPr lang="en-US" sz="800" dirty="0"/>
-          </a:p>
-        </p:txBody>
-      </p:sp>
-      <p:sp>
-        <p:nvSpPr>
-          <p:cNvPr id="9" name="Text 6"/>
-          <p:cNvSpPr/>
-          <p:nvPr/>
-        </p:nvSpPr>
-        <p:spPr>
-          <a:xfrm>
-            <a:off x="8229600" y="6400800"/>
-            <a:ext cx="3657600" cy="274320"/>
-          </a:xfrm>
-          <a:prstGeom prst="rect">
-            <a:avLst/>
-          </a:prstGeom>
-          <a:noFill/>
-          <a:ln/>
-        </p:spPr>
-        <p:txBody>
-          <a:bodyPr wrap="square" rtlCol="0" anchor="ctr"/>
-          <a:lstStyle/>
-          <a:p>
-            <a:pPr algn="r" indent="0" marL="0">
-              <a:buNone/>
-            </a:pPr>
-            <a:r>
-              <a:rPr lang="en-US" sz="800" dirty="0">
-                <a:solidFill>
-                  <a:srgbClr val="8B8FA3"/>
-                </a:solidFill>
-              </a:rPr>
-              <a:t>datacendia.com</a:t>
-            </a:r>
-            <a:endParaRPr lang="en-US" sz="800" dirty="0"/>
-          </a:p>
-        </p:txBody>
-      </p:sp>
     </p:spTree>
   </p:cSld>
   <p:clrMapOvr>
@@ -5218,9 +5218,81 @@
           </a:p>
         </p:txBody>
       </p:sp>
+      <p:sp>
+        <p:nvSpPr>
+          <p:cNvPr id="8" name="Text 5"/>
+          <p:cNvSpPr/>
+          <p:nvPr/>
+        </p:nvSpPr>
+        <p:spPr>
+          <a:xfrm>
+            <a:off x="457200" y="6400800"/>
+            <a:ext cx="3657600" cy="274320"/>
+          </a:xfrm>
+          <a:prstGeom prst="rect">
+            <a:avLst/>
+          </a:prstGeom>
+          <a:noFill/>
+          <a:ln/>
+        </p:spPr>
+        <p:txBody>
+          <a:bodyPr wrap="square" rtlCol="0" anchor="ctr"/>
+          <a:lstStyle/>
+          <a:p>
+            <a:pPr indent="0" marL="0">
+              <a:buNone/>
+            </a:pPr>
+            <a:r>
+              <a:rPr lang="en-US" sz="800" dirty="0">
+                <a:solidFill>
+                  <a:srgbClr val="8B8FA3"/>
+                </a:solidFill>
+              </a:rPr>
+              <a:t>© 2024-2026 Datacendia, LLC</a:t>
+            </a:r>
+            <a:endParaRPr lang="en-US" sz="800" dirty="0"/>
+          </a:p>
+        </p:txBody>
+      </p:sp>
+      <p:sp>
+        <p:nvSpPr>
+          <p:cNvPr id="9" name="Text 6"/>
+          <p:cNvSpPr/>
+          <p:nvPr/>
+        </p:nvSpPr>
+        <p:spPr>
+          <a:xfrm>
+            <a:off x="8229600" y="6400800"/>
+            <a:ext cx="3657600" cy="274320"/>
+          </a:xfrm>
+          <a:prstGeom prst="rect">
+            <a:avLst/>
+          </a:prstGeom>
+          <a:noFill/>
+          <a:ln/>
+        </p:spPr>
+        <p:txBody>
+          <a:bodyPr wrap="square" rtlCol="0" anchor="ctr"/>
+          <a:lstStyle/>
+          <a:p>
+            <a:pPr algn="r" indent="0" marL="0">
+              <a:buNone/>
+            </a:pPr>
+            <a:r>
+              <a:rPr lang="en-US" sz="800" dirty="0">
+                <a:solidFill>
+                  <a:srgbClr val="8B8FA3"/>
+                </a:solidFill>
+              </a:rPr>
+              <a:t>datacendia.com</a:t>
+            </a:r>
+            <a:endParaRPr lang="en-US" sz="800" dirty="0"/>
+          </a:p>
+        </p:txBody>
+      </p:sp>
       <p:pic>
         <p:nvPicPr>
-          <p:cNvPr id="7" name="Image 0" descr="preencoded.png">    </p:cNvPr>
+          <p:cNvPr id="10" name="Picture 9" descr="image.png"/>
           <p:cNvPicPr>
             <a:picLocks noChangeAspect="1"/>
           </p:cNvPicPr>
@@ -5242,78 +5314,6 @@
           </a:prstGeom>
         </p:spPr>
       </p:pic>
-      <p:sp>
-        <p:nvSpPr>
-          <p:cNvPr id="8" name="Text 5"/>
-          <p:cNvSpPr/>
-          <p:nvPr/>
-        </p:nvSpPr>
-        <p:spPr>
-          <a:xfrm>
-            <a:off x="457200" y="6400800"/>
-            <a:ext cx="3657600" cy="274320"/>
-          </a:xfrm>
-          <a:prstGeom prst="rect">
-            <a:avLst/>
-          </a:prstGeom>
-          <a:noFill/>
-          <a:ln/>
-        </p:spPr>
-        <p:txBody>
-          <a:bodyPr wrap="square" rtlCol="0" anchor="ctr"/>
-          <a:lstStyle/>
-          <a:p>
-            <a:pPr indent="0" marL="0">
-              <a:buNone/>
-            </a:pPr>
-            <a:r>
-              <a:rPr lang="en-US" sz="800" dirty="0">
-                <a:solidFill>
-                  <a:srgbClr val="8B8FA3"/>
-                </a:solidFill>
-              </a:rPr>
-              <a:t>© 2024-2026 Datacendia, LLC</a:t>
-            </a:r>
-            <a:endParaRPr lang="en-US" sz="800" dirty="0"/>
-          </a:p>
-        </p:txBody>
-      </p:sp>
-      <p:sp>
-        <p:nvSpPr>
-          <p:cNvPr id="9" name="Text 6"/>
-          <p:cNvSpPr/>
-          <p:nvPr/>
-        </p:nvSpPr>
-        <p:spPr>
-          <a:xfrm>
-            <a:off x="8229600" y="6400800"/>
-            <a:ext cx="3657600" cy="274320"/>
-          </a:xfrm>
-          <a:prstGeom prst="rect">
-            <a:avLst/>
-          </a:prstGeom>
-          <a:noFill/>
-          <a:ln/>
-        </p:spPr>
-        <p:txBody>
-          <a:bodyPr wrap="square" rtlCol="0" anchor="ctr"/>
-          <a:lstStyle/>
-          <a:p>
-            <a:pPr algn="r" indent="0" marL="0">
-              <a:buNone/>
-            </a:pPr>
-            <a:r>
-              <a:rPr lang="en-US" sz="800" dirty="0">
-                <a:solidFill>
-                  <a:srgbClr val="8B8FA3"/>
-                </a:solidFill>
-              </a:rPr>
-              <a:t>datacendia.com</a:t>
-            </a:r>
-            <a:endParaRPr lang="en-US" sz="800" dirty="0"/>
-          </a:p>
-        </p:txBody>
-      </p:sp>
     </p:spTree>
   </p:cSld>
   <p:clrMapOvr>
